--- a/workshops/session8-practical-linear-regression.pptx
+++ b/workshops/session8-practical-linear-regression.pptx
@@ -510,7 +510,8 @@
           <a:p>
             <a:r>
               <a:rPr lang="en-US" dirty="0"/>
-              <a:t/>
+              <a:t>جلسهٔ عملی: ساختن و اجرای یک مدل رگرسیون خطی.
+سؤال شروع: «آیا می‌توانید قیمت خانه را با یک خط پیش‌بینی کنید؟»</a:t>
             </a:r>
             <a:endParaRPr lang="en-US" dirty="0"/>
           </a:p>
@@ -598,7 +599,7 @@
           <a:p>
             <a:r>
               <a:rPr lang="en-US" dirty="0"/>
-              <a:t/>
+              <a:t>مرور: یادگیری ماشین = کشف الگو از داده.</a:t>
             </a:r>
             <a:endParaRPr lang="en-US" dirty="0"/>
           </a:p>
@@ -686,7 +687,10 @@
           <a:p>
             <a:r>
               <a:rPr lang="en-US" dirty="0"/>
-              <a:t/>
+              <a:t>مثال کارشته (روایت اجرای زنده):
+1. سه نقطهٔ داده (۸۰←۸، ۱۰۰←۱۰، ۱۲۰←۱۲) را نشان دهید و از شرکت‌کنندگان بخواهید خط را با دست روی هوا بکشند.
+2. از همه بخواهید حدس بزنند: خانهٔ ۱۱۰ متری چقدر؟
+پاسخ: ۱۱ میلیارد.</a:t>
             </a:r>
             <a:endParaRPr lang="en-US" dirty="0"/>
           </a:p>
@@ -774,7 +778,9 @@
           <a:p>
             <a:r>
               <a:rPr lang="en-US" dirty="0"/>
-              <a:t/>
+              <a:t>کد را خط‌به‌خط اجرا کنید.
+قبل از هر خط، از شرکت‌کنندگان بخواهید حدس بزنند.
+نکته: کد LTR (چپ‌به‌راست) است چون زبان Python انگلیسی است.</a:t>
             </a:r>
             <a:endParaRPr lang="en-US" dirty="0"/>
           </a:p>
@@ -862,7 +868,10 @@
           <a:p>
             <a:r>
               <a:rPr lang="en-US" dirty="0"/>
-              <a:t/>
+              <a:t>تصویر regression-fit.png را نشان دهید.
+توضیح: خط مدل از وسط نقاط عبور می‌کند.
+سؤال: «اگر خانهٔ ۱۱۰ متری داشته باشیم، مدل چه عددی می‌دهد؟»
+جواب: ۱۱ میلیارد — همان عددی که در جلسهٔ ۲ حدس زدیم.</a:t>
             </a:r>
             <a:endParaRPr lang="en-US" dirty="0"/>
           </a:p>
@@ -950,7 +959,11 @@
           <a:p>
             <a:r>
               <a:rPr lang="en-US" dirty="0"/>
-              <a:t/>
+              <a:t>مثال کارشته:
+شیب = ۰٫۱ یعنی هر متر اضافه = ۱۰۰ میلیون تومان.
+بایاس ≈ ۰ یعنی خط از مبدأ عبور می‌کند.
+R² = ۱ یعنی خط دقیقاً از همهٔ نقاط عبور می‌کند (چون داده‌ها دقیقاً خطی هستند).
+نکتهٔ صادقانه: «در دادهٔ واقعی R² کمتر از ۱ است.»</a:t>
             </a:r>
             <a:endParaRPr lang="en-US" dirty="0"/>
           </a:p>
@@ -1038,7 +1051,9 @@
           <a:p>
             <a:r>
               <a:rPr lang="en-US" dirty="0"/>
-              <a:t/>
+              <a:t>این ۵ سؤال را به‌صورت گفت‌وگو مطرح کنید.
+هدف: تثبیت یادگیری و ایجاد بحث.
+نیازی به جواب دقیق نیست؛ مهم فکرکردن است.</a:t>
             </a:r>
             <a:endParaRPr lang="en-US" dirty="0"/>
           </a:p>
@@ -1126,7 +1141,8 @@
           <a:p>
             <a:r>
               <a:rPr lang="en-US" dirty="0"/>
-              <a:t/>
+              <a:t>جمع‌بندی کل کارگاه.
+سؤال نهایی: «اگر بخواهید یک کار تکراری را با AI خودکار کنید، از کجا شروع می‌کنید؟»</a:t>
             </a:r>
             <a:endParaRPr lang="en-US" dirty="0"/>
           </a:p>
@@ -1214,7 +1230,8 @@
           <a:p>
             <a:r>
               <a:rPr lang="en-US" dirty="0"/>
-              <a:t/>
+              <a:t>منابع را معرفی کنید.
+تأکید: کارگاه بعدی = Agent (دستیار هوشمند با ابزار).</a:t>
             </a:r>
             <a:endParaRPr lang="en-US" dirty="0"/>
           </a:p>
@@ -1965,7 +1982,7 @@
       </p:sp>
       <p:sp>
         <p:nvSpPr>
-          <p:cNvPr id="5" name="Text 3"/>
+          <p:cNvPr id="6" name="Text 3"/>
           <p:cNvSpPr/>
           <p:nvPr/>
         </p:nvSpPr>
@@ -2004,7 +2021,7 @@
       </p:sp>
       <p:sp>
         <p:nvSpPr>
-          <p:cNvPr id="6" name="Text 4"/>
+          <p:cNvPr id="7" name="Text 4"/>
           <p:cNvSpPr/>
           <p:nvPr/>
         </p:nvSpPr>
@@ -2804,7 +2821,7 @@
       </p:sp>
       <p:sp>
         <p:nvSpPr>
-          <p:cNvPr id="6" name="Text 3"/>
+          <p:cNvPr id="7" name="Text 3"/>
           <p:cNvSpPr/>
           <p:nvPr/>
         </p:nvSpPr>
@@ -2843,7 +2860,7 @@
       </p:sp>
       <p:sp>
         <p:nvSpPr>
-          <p:cNvPr id="7" name="Text 4"/>
+          <p:cNvPr id="8" name="Text 4"/>
           <p:cNvSpPr/>
           <p:nvPr/>
         </p:nvSpPr>
@@ -3178,7 +3195,7 @@
       </p:sp>
       <p:sp>
         <p:nvSpPr>
-          <p:cNvPr id="7" name="Text 5"/>
+          <p:cNvPr id="8" name="Text 5"/>
           <p:cNvSpPr/>
           <p:nvPr/>
         </p:nvSpPr>
@@ -3217,7 +3234,7 @@
       </p:sp>
       <p:sp>
         <p:nvSpPr>
-          <p:cNvPr id="8" name="Text 6"/>
+          <p:cNvPr id="9" name="Text 6"/>
           <p:cNvSpPr/>
           <p:nvPr/>
         </p:nvSpPr>
@@ -3480,7 +3497,7 @@
       </p:sp>
       <p:sp>
         <p:nvSpPr>
-          <p:cNvPr id="6" name="Text 3"/>
+          <p:cNvPr id="7" name="Text 3"/>
           <p:cNvSpPr/>
           <p:nvPr/>
         </p:nvSpPr>
@@ -3519,7 +3536,7 @@
       </p:sp>
       <p:sp>
         <p:nvSpPr>
-          <p:cNvPr id="7" name="Text 4"/>
+          <p:cNvPr id="8" name="Text 4"/>
           <p:cNvSpPr/>
           <p:nvPr/>
         </p:nvSpPr>
@@ -4072,7 +4089,7 @@
       </p:sp>
       <p:sp>
         <p:nvSpPr>
-          <p:cNvPr id="17" name="Text 15"/>
+          <p:cNvPr id="18" name="Text 15"/>
           <p:cNvSpPr/>
           <p:nvPr/>
         </p:nvSpPr>
@@ -4111,7 +4128,7 @@
       </p:sp>
       <p:sp>
         <p:nvSpPr>
-          <p:cNvPr id="18" name="Text 16"/>
+          <p:cNvPr id="19" name="Text 16"/>
           <p:cNvSpPr/>
           <p:nvPr/>
         </p:nvSpPr>
@@ -4366,7 +4383,7 @@
       </p:sp>
       <p:sp>
         <p:nvSpPr>
-          <p:cNvPr id="5" name="Text 3"/>
+          <p:cNvPr id="6" name="Text 3"/>
           <p:cNvSpPr/>
           <p:nvPr/>
         </p:nvSpPr>
@@ -4405,7 +4422,7 @@
       </p:sp>
       <p:sp>
         <p:nvSpPr>
-          <p:cNvPr id="6" name="Text 4"/>
+          <p:cNvPr id="7" name="Text 4"/>
           <p:cNvSpPr/>
           <p:nvPr/>
         </p:nvSpPr>
@@ -4644,7 +4661,7 @@
       </p:sp>
       <p:sp>
         <p:nvSpPr>
-          <p:cNvPr id="5" name="Text 3"/>
+          <p:cNvPr id="6" name="Text 3"/>
           <p:cNvSpPr/>
           <p:nvPr/>
         </p:nvSpPr>
@@ -4683,7 +4700,7 @@
       </p:sp>
       <p:sp>
         <p:nvSpPr>
-          <p:cNvPr id="6" name="Text 4"/>
+          <p:cNvPr id="7" name="Text 4"/>
           <p:cNvSpPr/>
           <p:nvPr/>
         </p:nvSpPr>
@@ -4943,7 +4960,7 @@
       </p:sp>
       <p:sp>
         <p:nvSpPr>
-          <p:cNvPr id="5" name="Text 3"/>
+          <p:cNvPr id="6" name="Text 3"/>
           <p:cNvSpPr/>
           <p:nvPr/>
         </p:nvSpPr>
@@ -4982,7 +4999,7 @@
       </p:sp>
       <p:sp>
         <p:nvSpPr>
-          <p:cNvPr id="6" name="Text 4"/>
+          <p:cNvPr id="7" name="Text 4"/>
           <p:cNvSpPr/>
           <p:nvPr/>
         </p:nvSpPr>
